--- a/Assets/cover.pptx
+++ b/Assets/cover.pptx
@@ -6,6 +6,7 @@
   </p:sldMasterIdLst>
   <p:sldIdLst>
     <p:sldId id="256" r:id="rId2"/>
+    <p:sldId id="257" r:id="rId3"/>
   </p:sldIdLst>
   <p:sldSz cx="12192000" cy="6858000"/>
   <p:notesSz cx="6858000" cy="9144000"/>
@@ -104,7 +105,41 @@
       </a:defRPr>
     </a:lvl9pPr>
   </p:defaultTextStyle>
+  <p:extLst>
+    <p:ext uri="{EFAFB233-063F-42B5-8137-9DF3F51BA10A}">
+      <p15:sldGuideLst xmlns:p15="http://schemas.microsoft.com/office/powerpoint/2012/main"/>
+    </p:ext>
+  </p:extLst>
 </p:presentation>
+</file>
+
+<file path=ppt/revisionInfo.xml><?xml version="1.0" encoding="utf-8"?>
+<p1510:revInfo xmlns:a="http://schemas.openxmlformats.org/drawingml/2006/main" xmlns:r="http://schemas.openxmlformats.org/officeDocument/2006/relationships" xmlns:p1510="http://schemas.microsoft.com/office/powerpoint/2015/10/main">
+  <p1510:revLst>
+    <p1510:client id="{A41FAE34-053C-461D-8D81-48AAD005DAE6}" v="1" dt="2026-08-05T16:35:37.301"/>
+  </p1510:revLst>
+</p1510:revInfo>
+</file>
+
+<file path=ppt/changesInfos/changesInfo1.xml><?xml version="1.0" encoding="utf-8"?>
+<pc:chgInfo xmlns:a="http://schemas.openxmlformats.org/drawingml/2006/main" xmlns:r="http://schemas.openxmlformats.org/officeDocument/2006/relationships" xmlns:ac="http://schemas.microsoft.com/office/drawing/2013/main/command" xmlns:pc="http://schemas.microsoft.com/office/powerpoint/2013/main/command">
+  <pc:docChgLst>
+    <pc:chgData name="Neo Skinner" userId="8964888c5998ab0a" providerId="LiveId" clId="{DFDDC273-A734-4D08-9846-F2CA9FE5130A}"/>
+    <pc:docChg chg="addSld">
+      <pc:chgData name="Neo Skinner" userId="8964888c5998ab0a" providerId="LiveId" clId="{DFDDC273-A734-4D08-9846-F2CA9FE5130A}" dt="2026-08-05T16:34:35.725" v="0" actId="2890"/>
+      <pc:docMkLst>
+        <pc:docMk/>
+      </pc:docMkLst>
+      <pc:sldChg chg="add">
+        <pc:chgData name="Neo Skinner" userId="8964888c5998ab0a" providerId="LiveId" clId="{DFDDC273-A734-4D08-9846-F2CA9FE5130A}" dt="2026-08-05T16:34:35.725" v="0" actId="2890"/>
+        <pc:sldMkLst>
+          <pc:docMk/>
+          <pc:sldMk cId="1375543720" sldId="257"/>
+        </pc:sldMkLst>
+      </pc:sldChg>
+    </pc:docChg>
+  </pc:docChgLst>
+</pc:chgInfo>
 </file>
 
 <file path=ppt/slideLayouts/slideLayout1.xml><?xml version="1.0" encoding="utf-8"?>
@@ -256,7 +291,7 @@
           <a:p>
             <a:fld id="{BF8B4E43-B1D3-49C1-8A53-1ACBFFCA12BF}" type="datetimeFigureOut">
               <a:rPr lang="en-GB" smtClean="0"/>
-              <a:t>31/05/2026</a:t>
+              <a:t>05/08/2026</a:t>
             </a:fld>
             <a:endParaRPr lang="en-GB"/>
           </a:p>
@@ -456,7 +491,7 @@
           <a:p>
             <a:fld id="{BF8B4E43-B1D3-49C1-8A53-1ACBFFCA12BF}" type="datetimeFigureOut">
               <a:rPr lang="en-GB" smtClean="0"/>
-              <a:t>31/05/2026</a:t>
+              <a:t>05/08/2026</a:t>
             </a:fld>
             <a:endParaRPr lang="en-GB"/>
           </a:p>
@@ -666,7 +701,7 @@
           <a:p>
             <a:fld id="{BF8B4E43-B1D3-49C1-8A53-1ACBFFCA12BF}" type="datetimeFigureOut">
               <a:rPr lang="en-GB" smtClean="0"/>
-              <a:t>31/05/2026</a:t>
+              <a:t>05/08/2026</a:t>
             </a:fld>
             <a:endParaRPr lang="en-GB"/>
           </a:p>
@@ -866,7 +901,7 @@
           <a:p>
             <a:fld id="{BF8B4E43-B1D3-49C1-8A53-1ACBFFCA12BF}" type="datetimeFigureOut">
               <a:rPr lang="en-GB" smtClean="0"/>
-              <a:t>31/05/2026</a:t>
+              <a:t>05/08/2026</a:t>
             </a:fld>
             <a:endParaRPr lang="en-GB"/>
           </a:p>
@@ -1142,7 +1177,7 @@
           <a:p>
             <a:fld id="{BF8B4E43-B1D3-49C1-8A53-1ACBFFCA12BF}" type="datetimeFigureOut">
               <a:rPr lang="en-GB" smtClean="0"/>
-              <a:t>31/05/2026</a:t>
+              <a:t>05/08/2026</a:t>
             </a:fld>
             <a:endParaRPr lang="en-GB"/>
           </a:p>
@@ -1410,7 +1445,7 @@
           <a:p>
             <a:fld id="{BF8B4E43-B1D3-49C1-8A53-1ACBFFCA12BF}" type="datetimeFigureOut">
               <a:rPr lang="en-GB" smtClean="0"/>
-              <a:t>31/05/2026</a:t>
+              <a:t>05/08/2026</a:t>
             </a:fld>
             <a:endParaRPr lang="en-GB"/>
           </a:p>
@@ -1825,7 +1860,7 @@
           <a:p>
             <a:fld id="{BF8B4E43-B1D3-49C1-8A53-1ACBFFCA12BF}" type="datetimeFigureOut">
               <a:rPr lang="en-GB" smtClean="0"/>
-              <a:t>31/05/2026</a:t>
+              <a:t>05/08/2026</a:t>
             </a:fld>
             <a:endParaRPr lang="en-GB"/>
           </a:p>
@@ -1967,7 +2002,7 @@
           <a:p>
             <a:fld id="{BF8B4E43-B1D3-49C1-8A53-1ACBFFCA12BF}" type="datetimeFigureOut">
               <a:rPr lang="en-GB" smtClean="0"/>
-              <a:t>31/05/2026</a:t>
+              <a:t>05/08/2026</a:t>
             </a:fld>
             <a:endParaRPr lang="en-GB"/>
           </a:p>
@@ -2080,7 +2115,7 @@
           <a:p>
             <a:fld id="{BF8B4E43-B1D3-49C1-8A53-1ACBFFCA12BF}" type="datetimeFigureOut">
               <a:rPr lang="en-GB" smtClean="0"/>
-              <a:t>31/05/2026</a:t>
+              <a:t>05/08/2026</a:t>
             </a:fld>
             <a:endParaRPr lang="en-GB"/>
           </a:p>
@@ -2393,7 +2428,7 @@
           <a:p>
             <a:fld id="{BF8B4E43-B1D3-49C1-8A53-1ACBFFCA12BF}" type="datetimeFigureOut">
               <a:rPr lang="en-GB" smtClean="0"/>
-              <a:t>31/05/2026</a:t>
+              <a:t>05/08/2026</a:t>
             </a:fld>
             <a:endParaRPr lang="en-GB"/>
           </a:p>
@@ -2682,7 +2717,7 @@
           <a:p>
             <a:fld id="{BF8B4E43-B1D3-49C1-8A53-1ACBFFCA12BF}" type="datetimeFigureOut">
               <a:rPr lang="en-GB" smtClean="0"/>
-              <a:t>31/05/2026</a:t>
+              <a:t>05/08/2026</a:t>
             </a:fld>
             <a:endParaRPr lang="en-GB"/>
           </a:p>
@@ -2925,7 +2960,7 @@
           <a:p>
             <a:fld id="{BF8B4E43-B1D3-49C1-8A53-1ACBFFCA12BF}" type="datetimeFigureOut">
               <a:rPr lang="en-GB" smtClean="0"/>
-              <a:t>31/05/2026</a:t>
+              <a:t>05/08/2026</a:t>
             </a:fld>
             <a:endParaRPr lang="en-GB"/>
           </a:p>
@@ -3568,6 +3603,263 @@
 </p:sld>
 </file>
 
+<file path=ppt/slides/slide2.xml><?xml version="1.0" encoding="utf-8"?>
+<p:sld xmlns:a="http://schemas.openxmlformats.org/drawingml/2006/main" xmlns:r="http://schemas.openxmlformats.org/officeDocument/2006/relationships" xmlns:p="http://schemas.openxmlformats.org/presentationml/2006/main">
+  <p:cSld>
+    <p:bg>
+      <p:bgPr>
+        <a:solidFill>
+          <a:srgbClr val="98F5FF"/>
+        </a:solidFill>
+        <a:effectLst/>
+      </p:bgPr>
+    </p:bg>
+    <p:spTree>
+      <p:nvGrpSpPr>
+        <p:cNvPr id="1" name="">
+          <a:extLst>
+            <a:ext uri="{FF2B5EF4-FFF2-40B4-BE49-F238E27FC236}">
+              <a16:creationId xmlns:a16="http://schemas.microsoft.com/office/drawing/2014/main" id="{4675533A-36B2-BAC5-F6E9-8F669AA5378A}"/>
+            </a:ext>
+          </a:extLst>
+        </p:cNvPr>
+        <p:cNvGrpSpPr/>
+        <p:nvPr/>
+      </p:nvGrpSpPr>
+      <p:grpSpPr>
+        <a:xfrm>
+          <a:off x="0" y="0"/>
+          <a:ext cx="0" cy="0"/>
+          <a:chOff x="0" y="0"/>
+          <a:chExt cx="0" cy="0"/>
+        </a:xfrm>
+      </p:grpSpPr>
+      <p:pic>
+        <p:nvPicPr>
+          <p:cNvPr id="5" name="Graphic 4" descr="Atom with solid fill">
+            <a:extLst>
+              <a:ext uri="{FF2B5EF4-FFF2-40B4-BE49-F238E27FC236}">
+                <a16:creationId xmlns:a16="http://schemas.microsoft.com/office/drawing/2014/main" id="{5A210047-3848-9996-0EB2-7B2E38143CCC}"/>
+              </a:ext>
+            </a:extLst>
+          </p:cNvPr>
+          <p:cNvPicPr>
+            <a:picLocks noChangeAspect="1"/>
+          </p:cNvPicPr>
+          <p:nvPr/>
+        </p:nvPicPr>
+        <p:blipFill>
+          <a:blip>
+            <a:extLst>
+              <a:ext uri="{96DAC541-7B7A-43D3-8B79-37D633B846F1}">
+                <asvg:svgBlip xmlns:asvg="http://schemas.microsoft.com/office/drawing/2016/SVG/main" r:embed="rId2"/>
+              </a:ext>
+            </a:extLst>
+          </a:blip>
+          <a:stretch>
+            <a:fillRect/>
+          </a:stretch>
+        </p:blipFill>
+        <p:spPr>
+          <a:xfrm>
+            <a:off x="2862261" y="195262"/>
+            <a:ext cx="6467475" cy="6467475"/>
+          </a:xfrm>
+          <a:prstGeom prst="rect">
+            <a:avLst/>
+          </a:prstGeom>
+        </p:spPr>
+      </p:pic>
+      <p:sp>
+        <p:nvSpPr>
+          <p:cNvPr id="13" name="Oval 12">
+            <a:extLst>
+              <a:ext uri="{FF2B5EF4-FFF2-40B4-BE49-F238E27FC236}">
+                <a16:creationId xmlns:a16="http://schemas.microsoft.com/office/drawing/2014/main" id="{662C9864-97B4-78CA-CEAA-EA031E9206BF}"/>
+              </a:ext>
+            </a:extLst>
+          </p:cNvPr>
+          <p:cNvSpPr/>
+          <p:nvPr/>
+        </p:nvSpPr>
+        <p:spPr>
+          <a:xfrm rot="2470072">
+            <a:off x="4600575" y="4088259"/>
+            <a:ext cx="685800" cy="971550"/>
+          </a:xfrm>
+          <a:prstGeom prst="ellipse">
+            <a:avLst/>
+          </a:prstGeom>
+          <a:solidFill>
+            <a:schemeClr val="tx1"/>
+          </a:solidFill>
+          <a:ln>
+            <a:noFill/>
+          </a:ln>
+        </p:spPr>
+        <p:style>
+          <a:lnRef idx="2">
+            <a:schemeClr val="accent1">
+              <a:shade val="15000"/>
+            </a:schemeClr>
+          </a:lnRef>
+          <a:fillRef idx="1">
+            <a:schemeClr val="accent1"/>
+          </a:fillRef>
+          <a:effectRef idx="0">
+            <a:schemeClr val="accent1"/>
+          </a:effectRef>
+          <a:fontRef idx="minor">
+            <a:schemeClr val="lt1"/>
+          </a:fontRef>
+        </p:style>
+        <p:txBody>
+          <a:bodyPr rtlCol="0" anchor="ctr"/>
+          <a:lstStyle/>
+          <a:p>
+            <a:pPr algn="ctr"/>
+            <a:endParaRPr lang="en-GB"/>
+          </a:p>
+        </p:txBody>
+      </p:sp>
+      <p:pic>
+        <p:nvPicPr>
+          <p:cNvPr id="7" name="Graphic 6" descr="Pencil with solid fill">
+            <a:extLst>
+              <a:ext uri="{FF2B5EF4-FFF2-40B4-BE49-F238E27FC236}">
+                <a16:creationId xmlns:a16="http://schemas.microsoft.com/office/drawing/2014/main" id="{82B76F55-9FC9-2CF1-C1C9-238A5B45AD09}"/>
+              </a:ext>
+            </a:extLst>
+          </p:cNvPr>
+          <p:cNvPicPr>
+            <a:picLocks noChangeAspect="1"/>
+          </p:cNvPicPr>
+          <p:nvPr/>
+        </p:nvPicPr>
+        <p:blipFill>
+          <a:blip>
+            <a:extLst>
+              <a:ext uri="{96DAC541-7B7A-43D3-8B79-37D633B846F1}">
+                <asvg:svgBlip xmlns:asvg="http://schemas.microsoft.com/office/drawing/2016/SVG/main" r:embed="rId3"/>
+              </a:ext>
+            </a:extLst>
+          </a:blip>
+          <a:stretch>
+            <a:fillRect/>
+          </a:stretch>
+        </p:blipFill>
+        <p:spPr>
+          <a:xfrm>
+            <a:off x="3918347" y="1222772"/>
+            <a:ext cx="4355306" cy="4355306"/>
+          </a:xfrm>
+          <a:prstGeom prst="rect">
+            <a:avLst/>
+          </a:prstGeom>
+        </p:spPr>
+      </p:pic>
+      <p:pic>
+        <p:nvPicPr>
+          <p:cNvPr id="12" name="Graphic 11" descr="Atom with solid fill">
+            <a:extLst>
+              <a:ext uri="{FF2B5EF4-FFF2-40B4-BE49-F238E27FC236}">
+                <a16:creationId xmlns:a16="http://schemas.microsoft.com/office/drawing/2014/main" id="{8CE7E66D-3F99-C7AC-22D9-FB7EF26B20E7}"/>
+              </a:ext>
+            </a:extLst>
+          </p:cNvPr>
+          <p:cNvPicPr>
+            <a:picLocks noChangeAspect="1"/>
+          </p:cNvPicPr>
+          <p:nvPr/>
+        </p:nvPicPr>
+        <p:blipFill>
+          <a:blip>
+            <a:extLst>
+              <a:ext uri="{96DAC541-7B7A-43D3-8B79-37D633B846F1}">
+                <asvg:svgBlip xmlns:asvg="http://schemas.microsoft.com/office/drawing/2016/SVG/main" r:embed="rId2"/>
+              </a:ext>
+            </a:extLst>
+          </a:blip>
+          <a:srcRect l="50000" b="50000"/>
+          <a:stretch>
+            <a:fillRect/>
+          </a:stretch>
+        </p:blipFill>
+        <p:spPr>
+          <a:xfrm>
+            <a:off x="6096000" y="195263"/>
+            <a:ext cx="3233736" cy="3233738"/>
+          </a:xfrm>
+          <a:prstGeom prst="rect">
+            <a:avLst/>
+          </a:prstGeom>
+        </p:spPr>
+      </p:pic>
+      <p:sp>
+        <p:nvSpPr>
+          <p:cNvPr id="10" name="Rectangle 9">
+            <a:extLst>
+              <a:ext uri="{FF2B5EF4-FFF2-40B4-BE49-F238E27FC236}">
+                <a16:creationId xmlns:a16="http://schemas.microsoft.com/office/drawing/2014/main" id="{B1AD52D4-F376-CAA2-E9F6-B101E55C1795}"/>
+              </a:ext>
+            </a:extLst>
+          </p:cNvPr>
+          <p:cNvSpPr/>
+          <p:nvPr/>
+        </p:nvSpPr>
+        <p:spPr>
+          <a:xfrm>
+            <a:off x="6096000" y="2886075"/>
+            <a:ext cx="445889" cy="542925"/>
+          </a:xfrm>
+          <a:prstGeom prst="rect">
+            <a:avLst/>
+          </a:prstGeom>
+          <a:solidFill>
+            <a:schemeClr val="accent2"/>
+          </a:solidFill>
+          <a:ln>
+            <a:noFill/>
+          </a:ln>
+        </p:spPr>
+        <p:style>
+          <a:lnRef idx="2">
+            <a:schemeClr val="accent1">
+              <a:shade val="15000"/>
+            </a:schemeClr>
+          </a:lnRef>
+          <a:fillRef idx="1">
+            <a:schemeClr val="accent1"/>
+          </a:fillRef>
+          <a:effectRef idx="0">
+            <a:schemeClr val="accent1"/>
+          </a:effectRef>
+          <a:fontRef idx="minor">
+            <a:schemeClr val="lt1"/>
+          </a:fontRef>
+        </p:style>
+        <p:txBody>
+          <a:bodyPr rtlCol="0" anchor="ctr"/>
+          <a:lstStyle/>
+          <a:p>
+            <a:pPr algn="ctr"/>
+            <a:endParaRPr lang="en-GB"/>
+          </a:p>
+        </p:txBody>
+      </p:sp>
+    </p:spTree>
+    <p:extLst>
+      <p:ext uri="{BB962C8B-B14F-4D97-AF65-F5344CB8AC3E}">
+        <p14:creationId xmlns:p14="http://schemas.microsoft.com/office/powerpoint/2010/main" val="1375543720"/>
+      </p:ext>
+    </p:extLst>
+  </p:cSld>
+  <p:clrMapOvr>
+    <a:masterClrMapping/>
+  </p:clrMapOvr>
+</p:sld>
+</file>
+
 <file path=ppt/theme/theme1.xml><?xml version="1.0" encoding="utf-8"?>
 <a:theme xmlns:a="http://schemas.openxmlformats.org/drawingml/2006/main" name="Office Theme">
   <a:themeElements>
